--- a/宣道詩/(宣道詩37)寶血能力.pptx
+++ b/宣道詩/(宣道詩37)寶血能力.pptx
@@ -177,7 +177,7 @@
           <a:lstStyle/>
           <a:p>
             <a:r>
-              <a:rPr lang="en-US" altLang="zh-TW" smtClean="0"/>
+              <a:rPr lang="en-US" altLang="zh-TW"/>
               <a:t>Click to edit Master title style</a:t>
             </a:r>
             <a:endParaRPr lang="zh-TW" altLang="en-US"/>
@@ -296,7 +296,7 @@
           </a:lstStyle>
           <a:p>
             <a:r>
-              <a:rPr lang="en-US" altLang="zh-TW" smtClean="0"/>
+              <a:rPr lang="en-US" altLang="zh-TW"/>
               <a:t>Click to edit Master subtitle style</a:t>
             </a:r>
             <a:endParaRPr lang="zh-TW" altLang="en-US"/>
@@ -320,7 +320,7 @@
           <a:p>
             <a:fld id="{DE868643-A09C-4D86-8BED-66622358FC26}" type="datetimeFigureOut">
               <a:rPr lang="en-US" smtClean="0"/>
-              <a:t>12/3/2022</a:t>
+              <a:t>7/8/2024</a:t>
             </a:fld>
             <a:endParaRPr lang="en-US"/>
           </a:p>
@@ -414,7 +414,7 @@
           <a:lstStyle/>
           <a:p>
             <a:r>
-              <a:rPr lang="en-US" altLang="zh-TW" smtClean="0"/>
+              <a:rPr lang="en-US" altLang="zh-TW"/>
               <a:t>Click to edit Master title style</a:t>
             </a:r>
             <a:endParaRPr lang="zh-TW" altLang="en-US"/>
@@ -438,35 +438,35 @@
           <a:p>
             <a:pPr lvl="0"/>
             <a:r>
-              <a:rPr lang="en-US" altLang="zh-TW" smtClean="0"/>
+              <a:rPr lang="en-US" altLang="zh-TW"/>
               <a:t>Edit Master text styles</a:t>
             </a:r>
           </a:p>
           <a:p>
             <a:pPr lvl="1"/>
             <a:r>
-              <a:rPr lang="en-US" altLang="zh-TW" smtClean="0"/>
+              <a:rPr lang="en-US" altLang="zh-TW"/>
               <a:t>Second level</a:t>
             </a:r>
           </a:p>
           <a:p>
             <a:pPr lvl="2"/>
             <a:r>
-              <a:rPr lang="en-US" altLang="zh-TW" smtClean="0"/>
+              <a:rPr lang="en-US" altLang="zh-TW"/>
               <a:t>Third level</a:t>
             </a:r>
           </a:p>
           <a:p>
             <a:pPr lvl="3"/>
             <a:r>
-              <a:rPr lang="en-US" altLang="zh-TW" smtClean="0"/>
+              <a:rPr lang="en-US" altLang="zh-TW"/>
               <a:t>Fourth level</a:t>
             </a:r>
           </a:p>
           <a:p>
             <a:pPr lvl="4"/>
             <a:r>
-              <a:rPr lang="en-US" altLang="zh-TW" smtClean="0"/>
+              <a:rPr lang="en-US" altLang="zh-TW"/>
               <a:t>Fifth level</a:t>
             </a:r>
             <a:endParaRPr lang="zh-TW" altLang="en-US"/>
@@ -490,7 +490,7 @@
           <a:p>
             <a:fld id="{DE868643-A09C-4D86-8BED-66622358FC26}" type="datetimeFigureOut">
               <a:rPr lang="en-US" smtClean="0"/>
-              <a:t>12/3/2022</a:t>
+              <a:t>7/8/2024</a:t>
             </a:fld>
             <a:endParaRPr lang="en-US"/>
           </a:p>
@@ -589,7 +589,7 @@
           <a:lstStyle/>
           <a:p>
             <a:r>
-              <a:rPr lang="en-US" altLang="zh-TW" smtClean="0"/>
+              <a:rPr lang="en-US" altLang="zh-TW"/>
               <a:t>Click to edit Master title style</a:t>
             </a:r>
             <a:endParaRPr lang="zh-TW" altLang="en-US"/>
@@ -618,35 +618,35 @@
           <a:p>
             <a:pPr lvl="0"/>
             <a:r>
-              <a:rPr lang="en-US" altLang="zh-TW" smtClean="0"/>
+              <a:rPr lang="en-US" altLang="zh-TW"/>
               <a:t>Edit Master text styles</a:t>
             </a:r>
           </a:p>
           <a:p>
             <a:pPr lvl="1"/>
             <a:r>
-              <a:rPr lang="en-US" altLang="zh-TW" smtClean="0"/>
+              <a:rPr lang="en-US" altLang="zh-TW"/>
               <a:t>Second level</a:t>
             </a:r>
           </a:p>
           <a:p>
             <a:pPr lvl="2"/>
             <a:r>
-              <a:rPr lang="en-US" altLang="zh-TW" smtClean="0"/>
+              <a:rPr lang="en-US" altLang="zh-TW"/>
               <a:t>Third level</a:t>
             </a:r>
           </a:p>
           <a:p>
             <a:pPr lvl="3"/>
             <a:r>
-              <a:rPr lang="en-US" altLang="zh-TW" smtClean="0"/>
+              <a:rPr lang="en-US" altLang="zh-TW"/>
               <a:t>Fourth level</a:t>
             </a:r>
           </a:p>
           <a:p>
             <a:pPr lvl="4"/>
             <a:r>
-              <a:rPr lang="en-US" altLang="zh-TW" smtClean="0"/>
+              <a:rPr lang="en-US" altLang="zh-TW"/>
               <a:t>Fifth level</a:t>
             </a:r>
             <a:endParaRPr lang="zh-TW" altLang="en-US"/>
@@ -670,7 +670,7 @@
           <a:p>
             <a:fld id="{DE868643-A09C-4D86-8BED-66622358FC26}" type="datetimeFigureOut">
               <a:rPr lang="en-US" smtClean="0"/>
-              <a:t>12/3/2022</a:t>
+              <a:t>7/8/2024</a:t>
             </a:fld>
             <a:endParaRPr lang="en-US"/>
           </a:p>
@@ -764,7 +764,7 @@
           <a:lstStyle/>
           <a:p>
             <a:r>
-              <a:rPr lang="en-US" altLang="zh-TW" smtClean="0"/>
+              <a:rPr lang="en-US" altLang="zh-TW"/>
               <a:t>Click to edit Master title style</a:t>
             </a:r>
             <a:endParaRPr lang="zh-TW" altLang="en-US"/>
@@ -788,35 +788,35 @@
           <a:p>
             <a:pPr lvl="0"/>
             <a:r>
-              <a:rPr lang="en-US" altLang="zh-TW" smtClean="0"/>
+              <a:rPr lang="en-US" altLang="zh-TW"/>
               <a:t>Edit Master text styles</a:t>
             </a:r>
           </a:p>
           <a:p>
             <a:pPr lvl="1"/>
             <a:r>
-              <a:rPr lang="en-US" altLang="zh-TW" smtClean="0"/>
+              <a:rPr lang="en-US" altLang="zh-TW"/>
               <a:t>Second level</a:t>
             </a:r>
           </a:p>
           <a:p>
             <a:pPr lvl="2"/>
             <a:r>
-              <a:rPr lang="en-US" altLang="zh-TW" smtClean="0"/>
+              <a:rPr lang="en-US" altLang="zh-TW"/>
               <a:t>Third level</a:t>
             </a:r>
           </a:p>
           <a:p>
             <a:pPr lvl="3"/>
             <a:r>
-              <a:rPr lang="en-US" altLang="zh-TW" smtClean="0"/>
+              <a:rPr lang="en-US" altLang="zh-TW"/>
               <a:t>Fourth level</a:t>
             </a:r>
           </a:p>
           <a:p>
             <a:pPr lvl="4"/>
             <a:r>
-              <a:rPr lang="en-US" altLang="zh-TW" smtClean="0"/>
+              <a:rPr lang="en-US" altLang="zh-TW"/>
               <a:t>Fifth level</a:t>
             </a:r>
             <a:endParaRPr lang="zh-TW" altLang="en-US"/>
@@ -840,7 +840,7 @@
           <a:p>
             <a:fld id="{DE868643-A09C-4D86-8BED-66622358FC26}" type="datetimeFigureOut">
               <a:rPr lang="en-US" smtClean="0"/>
-              <a:t>12/3/2022</a:t>
+              <a:t>7/8/2024</a:t>
             </a:fld>
             <a:endParaRPr lang="en-US"/>
           </a:p>
@@ -943,7 +943,7 @@
           </a:lstStyle>
           <a:p>
             <a:r>
-              <a:rPr lang="en-US" altLang="zh-TW" smtClean="0"/>
+              <a:rPr lang="en-US" altLang="zh-TW"/>
               <a:t>Click to edit Master title style</a:t>
             </a:r>
             <a:endParaRPr lang="zh-TW" altLang="en-US"/>
@@ -1063,7 +1063,7 @@
           <a:p>
             <a:pPr lvl="0"/>
             <a:r>
-              <a:rPr lang="en-US" altLang="zh-TW" smtClean="0"/>
+              <a:rPr lang="en-US" altLang="zh-TW"/>
               <a:t>Edit Master text styles</a:t>
             </a:r>
           </a:p>
@@ -1086,7 +1086,7 @@
           <a:p>
             <a:fld id="{DE868643-A09C-4D86-8BED-66622358FC26}" type="datetimeFigureOut">
               <a:rPr lang="en-US" smtClean="0"/>
-              <a:t>12/3/2022</a:t>
+              <a:t>7/8/2024</a:t>
             </a:fld>
             <a:endParaRPr lang="en-US"/>
           </a:p>
@@ -1180,7 +1180,7 @@
           <a:lstStyle/>
           <a:p>
             <a:r>
-              <a:rPr lang="en-US" altLang="zh-TW" smtClean="0"/>
+              <a:rPr lang="en-US" altLang="zh-TW"/>
               <a:t>Click to edit Master title style</a:t>
             </a:r>
             <a:endParaRPr lang="zh-TW" altLang="en-US"/>
@@ -1237,35 +1237,35 @@
           <a:p>
             <a:pPr lvl="0"/>
             <a:r>
-              <a:rPr lang="en-US" altLang="zh-TW" smtClean="0"/>
+              <a:rPr lang="en-US" altLang="zh-TW"/>
               <a:t>Edit Master text styles</a:t>
             </a:r>
           </a:p>
           <a:p>
             <a:pPr lvl="1"/>
             <a:r>
-              <a:rPr lang="en-US" altLang="zh-TW" smtClean="0"/>
+              <a:rPr lang="en-US" altLang="zh-TW"/>
               <a:t>Second level</a:t>
             </a:r>
           </a:p>
           <a:p>
             <a:pPr lvl="2"/>
             <a:r>
-              <a:rPr lang="en-US" altLang="zh-TW" smtClean="0"/>
+              <a:rPr lang="en-US" altLang="zh-TW"/>
               <a:t>Third level</a:t>
             </a:r>
           </a:p>
           <a:p>
             <a:pPr lvl="3"/>
             <a:r>
-              <a:rPr lang="en-US" altLang="zh-TW" smtClean="0"/>
+              <a:rPr lang="en-US" altLang="zh-TW"/>
               <a:t>Fourth level</a:t>
             </a:r>
           </a:p>
           <a:p>
             <a:pPr lvl="4"/>
             <a:r>
-              <a:rPr lang="en-US" altLang="zh-TW" smtClean="0"/>
+              <a:rPr lang="en-US" altLang="zh-TW"/>
               <a:t>Fifth level</a:t>
             </a:r>
             <a:endParaRPr lang="zh-TW" altLang="en-US"/>
@@ -1322,35 +1322,35 @@
           <a:p>
             <a:pPr lvl="0"/>
             <a:r>
-              <a:rPr lang="en-US" altLang="zh-TW" smtClean="0"/>
+              <a:rPr lang="en-US" altLang="zh-TW"/>
               <a:t>Edit Master text styles</a:t>
             </a:r>
           </a:p>
           <a:p>
             <a:pPr lvl="1"/>
             <a:r>
-              <a:rPr lang="en-US" altLang="zh-TW" smtClean="0"/>
+              <a:rPr lang="en-US" altLang="zh-TW"/>
               <a:t>Second level</a:t>
             </a:r>
           </a:p>
           <a:p>
             <a:pPr lvl="2"/>
             <a:r>
-              <a:rPr lang="en-US" altLang="zh-TW" smtClean="0"/>
+              <a:rPr lang="en-US" altLang="zh-TW"/>
               <a:t>Third level</a:t>
             </a:r>
           </a:p>
           <a:p>
             <a:pPr lvl="3"/>
             <a:r>
-              <a:rPr lang="en-US" altLang="zh-TW" smtClean="0"/>
+              <a:rPr lang="en-US" altLang="zh-TW"/>
               <a:t>Fourth level</a:t>
             </a:r>
           </a:p>
           <a:p>
             <a:pPr lvl="4"/>
             <a:r>
-              <a:rPr lang="en-US" altLang="zh-TW" smtClean="0"/>
+              <a:rPr lang="en-US" altLang="zh-TW"/>
               <a:t>Fifth level</a:t>
             </a:r>
             <a:endParaRPr lang="zh-TW" altLang="en-US"/>
@@ -1374,7 +1374,7 @@
           <a:p>
             <a:fld id="{DE868643-A09C-4D86-8BED-66622358FC26}" type="datetimeFigureOut">
               <a:rPr lang="en-US" smtClean="0"/>
-              <a:t>12/3/2022</a:t>
+              <a:t>7/8/2024</a:t>
             </a:fld>
             <a:endParaRPr lang="en-US"/>
           </a:p>
@@ -1472,7 +1472,7 @@
           </a:lstStyle>
           <a:p>
             <a:r>
-              <a:rPr lang="en-US" altLang="zh-TW" smtClean="0"/>
+              <a:rPr lang="en-US" altLang="zh-TW"/>
               <a:t>Click to edit Master title style</a:t>
             </a:r>
             <a:endParaRPr lang="zh-TW" altLang="en-US"/>
@@ -1538,7 +1538,7 @@
           <a:p>
             <a:pPr lvl="0"/>
             <a:r>
-              <a:rPr lang="en-US" altLang="zh-TW" smtClean="0"/>
+              <a:rPr lang="en-US" altLang="zh-TW"/>
               <a:t>Edit Master text styles</a:t>
             </a:r>
           </a:p>
@@ -1594,35 +1594,35 @@
           <a:p>
             <a:pPr lvl="0"/>
             <a:r>
-              <a:rPr lang="en-US" altLang="zh-TW" smtClean="0"/>
+              <a:rPr lang="en-US" altLang="zh-TW"/>
               <a:t>Edit Master text styles</a:t>
             </a:r>
           </a:p>
           <a:p>
             <a:pPr lvl="1"/>
             <a:r>
-              <a:rPr lang="en-US" altLang="zh-TW" smtClean="0"/>
+              <a:rPr lang="en-US" altLang="zh-TW"/>
               <a:t>Second level</a:t>
             </a:r>
           </a:p>
           <a:p>
             <a:pPr lvl="2"/>
             <a:r>
-              <a:rPr lang="en-US" altLang="zh-TW" smtClean="0"/>
+              <a:rPr lang="en-US" altLang="zh-TW"/>
               <a:t>Third level</a:t>
             </a:r>
           </a:p>
           <a:p>
             <a:pPr lvl="3"/>
             <a:r>
-              <a:rPr lang="en-US" altLang="zh-TW" smtClean="0"/>
+              <a:rPr lang="en-US" altLang="zh-TW"/>
               <a:t>Fourth level</a:t>
             </a:r>
           </a:p>
           <a:p>
             <a:pPr lvl="4"/>
             <a:r>
-              <a:rPr lang="en-US" altLang="zh-TW" smtClean="0"/>
+              <a:rPr lang="en-US" altLang="zh-TW"/>
               <a:t>Fifth level</a:t>
             </a:r>
             <a:endParaRPr lang="zh-TW" altLang="en-US"/>
@@ -1688,7 +1688,7 @@
           <a:p>
             <a:pPr lvl="0"/>
             <a:r>
-              <a:rPr lang="en-US" altLang="zh-TW" smtClean="0"/>
+              <a:rPr lang="en-US" altLang="zh-TW"/>
               <a:t>Edit Master text styles</a:t>
             </a:r>
           </a:p>
@@ -1744,35 +1744,35 @@
           <a:p>
             <a:pPr lvl="0"/>
             <a:r>
-              <a:rPr lang="en-US" altLang="zh-TW" smtClean="0"/>
+              <a:rPr lang="en-US" altLang="zh-TW"/>
               <a:t>Edit Master text styles</a:t>
             </a:r>
           </a:p>
           <a:p>
             <a:pPr lvl="1"/>
             <a:r>
-              <a:rPr lang="en-US" altLang="zh-TW" smtClean="0"/>
+              <a:rPr lang="en-US" altLang="zh-TW"/>
               <a:t>Second level</a:t>
             </a:r>
           </a:p>
           <a:p>
             <a:pPr lvl="2"/>
             <a:r>
-              <a:rPr lang="en-US" altLang="zh-TW" smtClean="0"/>
+              <a:rPr lang="en-US" altLang="zh-TW"/>
               <a:t>Third level</a:t>
             </a:r>
           </a:p>
           <a:p>
             <a:pPr lvl="3"/>
             <a:r>
-              <a:rPr lang="en-US" altLang="zh-TW" smtClean="0"/>
+              <a:rPr lang="en-US" altLang="zh-TW"/>
               <a:t>Fourth level</a:t>
             </a:r>
           </a:p>
           <a:p>
             <a:pPr lvl="4"/>
             <a:r>
-              <a:rPr lang="en-US" altLang="zh-TW" smtClean="0"/>
+              <a:rPr lang="en-US" altLang="zh-TW"/>
               <a:t>Fifth level</a:t>
             </a:r>
             <a:endParaRPr lang="zh-TW" altLang="en-US"/>
@@ -1796,7 +1796,7 @@
           <a:p>
             <a:fld id="{DE868643-A09C-4D86-8BED-66622358FC26}" type="datetimeFigureOut">
               <a:rPr lang="en-US" smtClean="0"/>
-              <a:t>12/3/2022</a:t>
+              <a:t>7/8/2024</a:t>
             </a:fld>
             <a:endParaRPr lang="en-US"/>
           </a:p>
@@ -1890,7 +1890,7 @@
           <a:lstStyle/>
           <a:p>
             <a:r>
-              <a:rPr lang="en-US" altLang="zh-TW" smtClean="0"/>
+              <a:rPr lang="en-US" altLang="zh-TW"/>
               <a:t>Click to edit Master title style</a:t>
             </a:r>
             <a:endParaRPr lang="zh-TW" altLang="en-US"/>
@@ -1914,7 +1914,7 @@
           <a:p>
             <a:fld id="{DE868643-A09C-4D86-8BED-66622358FC26}" type="datetimeFigureOut">
               <a:rPr lang="en-US" smtClean="0"/>
-              <a:t>12/3/2022</a:t>
+              <a:t>7/8/2024</a:t>
             </a:fld>
             <a:endParaRPr lang="en-US"/>
           </a:p>
@@ -2009,7 +2009,7 @@
           <a:p>
             <a:fld id="{DE868643-A09C-4D86-8BED-66622358FC26}" type="datetimeFigureOut">
               <a:rPr lang="en-US" smtClean="0"/>
-              <a:t>12/3/2022</a:t>
+              <a:t>7/8/2024</a:t>
             </a:fld>
             <a:endParaRPr lang="en-US"/>
           </a:p>
@@ -2112,7 +2112,7 @@
           </a:lstStyle>
           <a:p>
             <a:r>
-              <a:rPr lang="en-US" altLang="zh-TW" smtClean="0"/>
+              <a:rPr lang="en-US" altLang="zh-TW"/>
               <a:t>Click to edit Master title style</a:t>
             </a:r>
             <a:endParaRPr lang="zh-TW" altLang="en-US"/>
@@ -2169,35 +2169,35 @@
           <a:p>
             <a:pPr lvl="0"/>
             <a:r>
-              <a:rPr lang="en-US" altLang="zh-TW" smtClean="0"/>
+              <a:rPr lang="en-US" altLang="zh-TW"/>
               <a:t>Edit Master text styles</a:t>
             </a:r>
           </a:p>
           <a:p>
             <a:pPr lvl="1"/>
             <a:r>
-              <a:rPr lang="en-US" altLang="zh-TW" smtClean="0"/>
+              <a:rPr lang="en-US" altLang="zh-TW"/>
               <a:t>Second level</a:t>
             </a:r>
           </a:p>
           <a:p>
             <a:pPr lvl="2"/>
             <a:r>
-              <a:rPr lang="en-US" altLang="zh-TW" smtClean="0"/>
+              <a:rPr lang="en-US" altLang="zh-TW"/>
               <a:t>Third level</a:t>
             </a:r>
           </a:p>
           <a:p>
             <a:pPr lvl="3"/>
             <a:r>
-              <a:rPr lang="en-US" altLang="zh-TW" smtClean="0"/>
+              <a:rPr lang="en-US" altLang="zh-TW"/>
               <a:t>Fourth level</a:t>
             </a:r>
           </a:p>
           <a:p>
             <a:pPr lvl="4"/>
             <a:r>
-              <a:rPr lang="en-US" altLang="zh-TW" smtClean="0"/>
+              <a:rPr lang="en-US" altLang="zh-TW"/>
               <a:t>Fifth level</a:t>
             </a:r>
             <a:endParaRPr lang="zh-TW" altLang="en-US"/>
@@ -2263,7 +2263,7 @@
           <a:p>
             <a:pPr lvl="0"/>
             <a:r>
-              <a:rPr lang="en-US" altLang="zh-TW" smtClean="0"/>
+              <a:rPr lang="en-US" altLang="zh-TW"/>
               <a:t>Edit Master text styles</a:t>
             </a:r>
           </a:p>
@@ -2286,7 +2286,7 @@
           <a:p>
             <a:fld id="{DE868643-A09C-4D86-8BED-66622358FC26}" type="datetimeFigureOut">
               <a:rPr lang="en-US" smtClean="0"/>
-              <a:t>12/3/2022</a:t>
+              <a:t>7/8/2024</a:t>
             </a:fld>
             <a:endParaRPr lang="en-US"/>
           </a:p>
@@ -2389,7 +2389,7 @@
           </a:lstStyle>
           <a:p>
             <a:r>
-              <a:rPr lang="en-US" altLang="zh-TW" smtClean="0"/>
+              <a:rPr lang="en-US" altLang="zh-TW"/>
               <a:t>Click to edit Master title style</a:t>
             </a:r>
             <a:endParaRPr lang="zh-TW" altLang="en-US"/>
@@ -2454,7 +2454,7 @@
           </a:lstStyle>
           <a:p>
             <a:r>
-              <a:rPr lang="en-US" altLang="zh-TW" smtClean="0"/>
+              <a:rPr lang="en-US" altLang="zh-TW"/>
               <a:t>Click icon to add picture</a:t>
             </a:r>
             <a:endParaRPr lang="zh-TW" altLang="en-US"/>
@@ -2520,7 +2520,7 @@
           <a:p>
             <a:pPr lvl="0"/>
             <a:r>
-              <a:rPr lang="en-US" altLang="zh-TW" smtClean="0"/>
+              <a:rPr lang="en-US" altLang="zh-TW"/>
               <a:t>Edit Master text styles</a:t>
             </a:r>
           </a:p>
@@ -2543,7 +2543,7 @@
           <a:p>
             <a:fld id="{DE868643-A09C-4D86-8BED-66622358FC26}" type="datetimeFigureOut">
               <a:rPr lang="en-US" smtClean="0"/>
-              <a:t>12/3/2022</a:t>
+              <a:t>7/8/2024</a:t>
             </a:fld>
             <a:endParaRPr lang="en-US"/>
           </a:p>
@@ -2657,10 +2657,9 @@
           <a:lstStyle/>
           <a:p>
             <a:r>
-              <a:rPr lang="zh-TW" altLang="en-US" smtClean="0"/>
+              <a:rPr lang="zh-TW" altLang="en-US"/>
               <a:t>按一下以編輯母片標題樣式</a:t>
             </a:r>
-            <a:endParaRPr lang="zh-TW" altLang="en-US"/>
           </a:p>
         </p:txBody>
       </p:sp>
@@ -2691,38 +2690,37 @@
           <a:p>
             <a:pPr lvl="0"/>
             <a:r>
-              <a:rPr lang="zh-TW" altLang="en-US" smtClean="0"/>
+              <a:rPr lang="zh-TW" altLang="en-US"/>
               <a:t>按一下以編輯母片文字樣式</a:t>
             </a:r>
           </a:p>
           <a:p>
             <a:pPr lvl="1"/>
             <a:r>
-              <a:rPr lang="zh-TW" altLang="en-US" smtClean="0"/>
+              <a:rPr lang="zh-TW" altLang="en-US"/>
               <a:t>第二層</a:t>
             </a:r>
           </a:p>
           <a:p>
             <a:pPr lvl="2"/>
             <a:r>
-              <a:rPr lang="zh-TW" altLang="en-US" smtClean="0"/>
+              <a:rPr lang="zh-TW" altLang="en-US"/>
               <a:t>第三層</a:t>
             </a:r>
           </a:p>
           <a:p>
             <a:pPr lvl="3"/>
             <a:r>
-              <a:rPr lang="zh-TW" altLang="en-US" smtClean="0"/>
+              <a:rPr lang="zh-TW" altLang="en-US"/>
               <a:t>第四層</a:t>
             </a:r>
           </a:p>
           <a:p>
             <a:pPr lvl="4"/>
             <a:r>
-              <a:rPr lang="zh-TW" altLang="en-US" smtClean="0"/>
+              <a:rPr lang="zh-TW" altLang="en-US"/>
               <a:t>第五層</a:t>
             </a:r>
-            <a:endParaRPr lang="zh-TW" altLang="en-US"/>
           </a:p>
         </p:txBody>
       </p:sp>
@@ -2761,7 +2759,7 @@
           <a:p>
             <a:fld id="{DE868643-A09C-4D86-8BED-66622358FC26}" type="datetimeFigureOut">
               <a:rPr lang="en-US" smtClean="0"/>
-              <a:t>12/3/2022</a:t>
+              <a:t>7/8/2024</a:t>
             </a:fld>
             <a:endParaRPr lang="en-US"/>
           </a:p>
@@ -3192,23 +3190,6 @@
               </a:rPr>
               <a:t>37</a:t>
             </a:r>
-            <a:r>
-              <a:rPr lang="en-US" altLang="zh-CN" sz="7200" b="1" i="1" dirty="0">
-                <a:solidFill>
-                  <a:srgbClr val="660033"/>
-                </a:solidFill>
-                <a:effectLst>
-                  <a:outerShdw blurRad="38100" dist="38100" dir="2700000" algn="tl">
-                    <a:srgbClr val="000000">
-                      <a:alpha val="43137"/>
-                    </a:srgbClr>
-                  </a:outerShdw>
-                </a:effectLst>
-                <a:latin typeface="微軟正黑體" pitchFamily="34" charset="-120"/>
-                <a:ea typeface="微軟正黑體" pitchFamily="34" charset="-120"/>
-              </a:rPr>
-              <a:t/>
-            </a:r>
             <a:br>
               <a:rPr lang="en-US" altLang="zh-CN" sz="7200" b="1" i="1" dirty="0">
                 <a:solidFill>
@@ -3240,24 +3221,7 @@
                 <a:latin typeface="微軟正黑體" pitchFamily="34" charset="-120"/>
                 <a:ea typeface="微軟正黑體" pitchFamily="34" charset="-120"/>
               </a:rPr>
-              <a:t>寶</a:t>
-            </a:r>
-            <a:r>
-              <a:rPr lang="zh-CN" altLang="en-US" sz="8000" b="1" dirty="0">
-                <a:solidFill>
-                  <a:srgbClr val="660033"/>
-                </a:solidFill>
-                <a:effectLst>
-                  <a:outerShdw blurRad="38100" dist="38100" dir="2700000" algn="tl">
-                    <a:srgbClr val="000000">
-                      <a:alpha val="43137"/>
-                    </a:srgbClr>
-                  </a:outerShdw>
-                </a:effectLst>
-                <a:latin typeface="微軟正黑體" pitchFamily="34" charset="-120"/>
-                <a:ea typeface="微軟正黑體" pitchFamily="34" charset="-120"/>
-              </a:rPr>
-              <a:t>血能力</a:t>
+              <a:t>寶血能力</a:t>
             </a:r>
             <a:endParaRPr lang="zh-TW" altLang="en-US" sz="8000" b="1" dirty="0">
               <a:solidFill>
@@ -3286,13 +3250,6 @@
   <p:clrMapOvr>
     <a:masterClrMapping/>
   </p:clrMapOvr>
-  <p:timing>
-    <p:tnLst>
-      <p:par>
-        <p:cTn id="1" dur="indefinite" restart="never" nodeType="tmRoot"/>
-      </p:par>
-    </p:tnLst>
-  </p:timing>
 </p:sld>
 </file>
 
@@ -3389,7 +3346,7 @@
         <p:spPr>
           <a:xfrm>
             <a:off x="0" y="5061182"/>
-            <a:ext cx="12192000" cy="830997"/>
+            <a:ext cx="12192000" cy="646331"/>
           </a:xfrm>
           <a:prstGeom prst="rect">
             <a:avLst/>
@@ -3404,14 +3361,14 @@
           <a:p>
             <a:pPr algn="ctr"/>
             <a:r>
-              <a:rPr lang="en-US" sz="4800" b="1" dirty="0">
+              <a:rPr lang="en-US" sz="3600" b="1" dirty="0">
                 <a:solidFill>
                   <a:srgbClr val="660033"/>
                 </a:solidFill>
               </a:rPr>
               <a:t>( 3 / 4 )</a:t>
             </a:r>
-            <a:endParaRPr lang="vi-VN" sz="4800" b="1" dirty="0">
+            <a:endParaRPr lang="vi-VN" sz="3600" b="1" dirty="0">
               <a:solidFill>
                 <a:srgbClr val="660033"/>
               </a:solidFill>
@@ -3429,13 +3386,6 @@
   <p:clrMapOvr>
     <a:masterClrMapping/>
   </p:clrMapOvr>
-  <p:timing>
-    <p:tnLst>
-      <p:par>
-        <p:cTn id="1" dur="indefinite" restart="never" nodeType="tmRoot"/>
-      </p:par>
-    </p:tnLst>
-  </p:timing>
 </p:sld>
 </file>
 
@@ -3532,7 +3482,7 @@
         <p:spPr>
           <a:xfrm>
             <a:off x="0" y="5061182"/>
-            <a:ext cx="12192000" cy="830997"/>
+            <a:ext cx="12192000" cy="646331"/>
           </a:xfrm>
           <a:prstGeom prst="rect">
             <a:avLst/>
@@ -3547,14 +3497,14 @@
           <a:p>
             <a:pPr algn="ctr"/>
             <a:r>
-              <a:rPr lang="en-US" sz="4800" b="1" dirty="0">
+              <a:rPr lang="en-US" sz="3600" b="1" dirty="0">
                 <a:solidFill>
                   <a:srgbClr val="660033"/>
                 </a:solidFill>
               </a:rPr>
               <a:t>( 3 / 4 )</a:t>
             </a:r>
-            <a:endParaRPr lang="vi-VN" sz="4800" b="1" dirty="0">
+            <a:endParaRPr lang="vi-VN" sz="3600" b="1" dirty="0">
               <a:solidFill>
                 <a:srgbClr val="660033"/>
               </a:solidFill>
@@ -3572,13 +3522,6 @@
   <p:clrMapOvr>
     <a:masterClrMapping/>
   </p:clrMapOvr>
-  <p:timing>
-    <p:tnLst>
-      <p:par>
-        <p:cTn id="1" dur="indefinite" restart="never" nodeType="tmRoot"/>
-      </p:par>
-    </p:tnLst>
-  </p:timing>
 </p:sld>
 </file>
 
@@ -3676,13 +3619,6 @@
   <p:clrMapOvr>
     <a:masterClrMapping/>
   </p:clrMapOvr>
-  <p:timing>
-    <p:tnLst>
-      <p:par>
-        <p:cTn id="1" dur="indefinite" restart="never" nodeType="tmRoot"/>
-      </p:par>
-    </p:tnLst>
-  </p:timing>
 </p:sld>
 </file>
 
@@ -3780,13 +3716,6 @@
   <p:clrMapOvr>
     <a:masterClrMapping/>
   </p:clrMapOvr>
-  <p:timing>
-    <p:tnLst>
-      <p:par>
-        <p:cTn id="1" dur="indefinite" restart="never" nodeType="tmRoot"/>
-      </p:par>
-    </p:tnLst>
-  </p:timing>
 </p:sld>
 </file>
 
@@ -3883,7 +3812,7 @@
         <p:spPr>
           <a:xfrm>
             <a:off x="0" y="5061182"/>
-            <a:ext cx="12192000" cy="830997"/>
+            <a:ext cx="12192000" cy="646331"/>
           </a:xfrm>
           <a:prstGeom prst="rect">
             <a:avLst/>
@@ -3898,14 +3827,14 @@
           <a:p>
             <a:pPr algn="ctr"/>
             <a:r>
-              <a:rPr lang="en-US" sz="4800" b="1" dirty="0">
+              <a:rPr lang="en-US" sz="3600" b="1" dirty="0">
                 <a:solidFill>
                   <a:srgbClr val="660033"/>
                 </a:solidFill>
               </a:rPr>
               <a:t>( 4 / 4 )</a:t>
             </a:r>
-            <a:endParaRPr lang="vi-VN" sz="4800" b="1" dirty="0">
+            <a:endParaRPr lang="vi-VN" sz="3600" b="1" dirty="0">
               <a:solidFill>
                 <a:srgbClr val="660033"/>
               </a:solidFill>
@@ -3923,13 +3852,6 @@
   <p:clrMapOvr>
     <a:masterClrMapping/>
   </p:clrMapOvr>
-  <p:timing>
-    <p:tnLst>
-      <p:par>
-        <p:cTn id="1" dur="indefinite" restart="never" nodeType="tmRoot"/>
-      </p:par>
-    </p:tnLst>
-  </p:timing>
 </p:sld>
 </file>
 
@@ -4026,7 +3948,7 @@
         <p:spPr>
           <a:xfrm>
             <a:off x="0" y="5061182"/>
-            <a:ext cx="12192000" cy="830997"/>
+            <a:ext cx="12192000" cy="646331"/>
           </a:xfrm>
           <a:prstGeom prst="rect">
             <a:avLst/>
@@ -4041,14 +3963,14 @@
           <a:p>
             <a:pPr algn="ctr"/>
             <a:r>
-              <a:rPr lang="en-US" sz="4800" b="1" dirty="0">
+              <a:rPr lang="en-US" sz="3600" b="1" dirty="0">
                 <a:solidFill>
                   <a:srgbClr val="660033"/>
                 </a:solidFill>
               </a:rPr>
               <a:t>( 4 / 4 )</a:t>
             </a:r>
-            <a:endParaRPr lang="vi-VN" sz="4800" b="1" dirty="0">
+            <a:endParaRPr lang="vi-VN" sz="3600" b="1" dirty="0">
               <a:solidFill>
                 <a:srgbClr val="660033"/>
               </a:solidFill>
@@ -4066,13 +3988,6 @@
   <p:clrMapOvr>
     <a:masterClrMapping/>
   </p:clrMapOvr>
-  <p:timing>
-    <p:tnLst>
-      <p:par>
-        <p:cTn id="1" dur="indefinite" restart="never" nodeType="tmRoot"/>
-      </p:par>
-    </p:tnLst>
-  </p:timing>
 </p:sld>
 </file>
 
@@ -4170,13 +4085,6 @@
   <p:clrMapOvr>
     <a:masterClrMapping/>
   </p:clrMapOvr>
-  <p:timing>
-    <p:tnLst>
-      <p:par>
-        <p:cTn id="1" dur="indefinite" restart="never" nodeType="tmRoot"/>
-      </p:par>
-    </p:tnLst>
-  </p:timing>
 </p:sld>
 </file>
 
@@ -4274,13 +4182,6 @@
   <p:clrMapOvr>
     <a:masterClrMapping/>
   </p:clrMapOvr>
-  <p:timing>
-    <p:tnLst>
-      <p:par>
-        <p:cTn id="1" dur="indefinite" restart="never" nodeType="tmRoot"/>
-      </p:par>
-    </p:tnLst>
-  </p:timing>
 </p:sld>
 </file>
 
@@ -4334,17 +4235,7 @@
                 <a:latin typeface="Microsoft JhengHei" pitchFamily="34" charset="-120"/>
                 <a:ea typeface="Microsoft JhengHei" pitchFamily="34" charset="-120"/>
               </a:rPr>
-              <a:t>你</a:t>
-            </a:r>
-            <a:r>
-              <a:rPr lang="zh-CN" altLang="en-US" sz="6400" b="1" dirty="0">
-                <a:solidFill>
-                  <a:srgbClr val="660033"/>
-                </a:solidFill>
-                <a:latin typeface="Microsoft JhengHei" pitchFamily="34" charset="-120"/>
-                <a:ea typeface="Microsoft JhengHei" pitchFamily="34" charset="-120"/>
-              </a:rPr>
-              <a:t>願從你的罪擔釋放麼</a:t>
+              <a:t>你願從你的罪擔釋放麼</a:t>
             </a:r>
             <a:endParaRPr lang="en-US" altLang="zh-CN" sz="6400" b="1" dirty="0">
               <a:solidFill>
@@ -4407,7 +4298,7 @@
         <p:spPr>
           <a:xfrm>
             <a:off x="0" y="5061182"/>
-            <a:ext cx="12192000" cy="830997"/>
+            <a:ext cx="12192000" cy="646331"/>
           </a:xfrm>
           <a:prstGeom prst="rect">
             <a:avLst/>
@@ -4422,14 +4313,14 @@
           <a:p>
             <a:pPr algn="ctr"/>
             <a:r>
-              <a:rPr lang="en-US" sz="4800" b="1" dirty="0">
+              <a:rPr lang="en-US" sz="3600" b="1" dirty="0">
                 <a:solidFill>
                   <a:srgbClr val="660033"/>
                 </a:solidFill>
               </a:rPr>
               <a:t>( 1 / 4 )</a:t>
             </a:r>
-            <a:endParaRPr lang="vi-VN" sz="4800" b="1" dirty="0">
+            <a:endParaRPr lang="vi-VN" sz="3600" b="1" dirty="0">
               <a:solidFill>
                 <a:srgbClr val="660033"/>
               </a:solidFill>
@@ -4447,13 +4338,6 @@
   <p:clrMapOvr>
     <a:masterClrMapping/>
   </p:clrMapOvr>
-  <p:timing>
-    <p:tnLst>
-      <p:par>
-        <p:cTn id="1" dur="indefinite" restart="never" nodeType="tmRoot"/>
-      </p:par>
-    </p:tnLst>
-  </p:timing>
 </p:sld>
 </file>
 
@@ -4550,7 +4434,7 @@
         <p:spPr>
           <a:xfrm>
             <a:off x="0" y="5061182"/>
-            <a:ext cx="12192000" cy="830997"/>
+            <a:ext cx="12192000" cy="646331"/>
           </a:xfrm>
           <a:prstGeom prst="rect">
             <a:avLst/>
@@ -4565,14 +4449,14 @@
           <a:p>
             <a:pPr algn="ctr"/>
             <a:r>
-              <a:rPr lang="en-US" sz="4800" b="1" dirty="0">
+              <a:rPr lang="en-US" sz="3600" b="1" dirty="0">
                 <a:solidFill>
                   <a:srgbClr val="660033"/>
                 </a:solidFill>
               </a:rPr>
               <a:t>( 1 / 4 )</a:t>
             </a:r>
-            <a:endParaRPr lang="vi-VN" sz="4800" b="1" dirty="0">
+            <a:endParaRPr lang="vi-VN" sz="3600" b="1" dirty="0">
               <a:solidFill>
                 <a:srgbClr val="660033"/>
               </a:solidFill>
@@ -4590,13 +4474,6 @@
   <p:clrMapOvr>
     <a:masterClrMapping/>
   </p:clrMapOvr>
-  <p:timing>
-    <p:tnLst>
-      <p:par>
-        <p:cTn id="1" dur="indefinite" restart="never" nodeType="tmRoot"/>
-      </p:par>
-    </p:tnLst>
-  </p:timing>
 </p:sld>
 </file>
 
@@ -4694,13 +4571,6 @@
   <p:clrMapOvr>
     <a:masterClrMapping/>
   </p:clrMapOvr>
-  <p:timing>
-    <p:tnLst>
-      <p:par>
-        <p:cTn id="1" dur="indefinite" restart="never" nodeType="tmRoot"/>
-      </p:par>
-    </p:tnLst>
-  </p:timing>
 </p:sld>
 </file>
 
@@ -4798,13 +4668,6 @@
   <p:clrMapOvr>
     <a:masterClrMapping/>
   </p:clrMapOvr>
-  <p:timing>
-    <p:tnLst>
-      <p:par>
-        <p:cTn id="1" dur="indefinite" restart="never" nodeType="tmRoot"/>
-      </p:par>
-    </p:tnLst>
-  </p:timing>
 </p:sld>
 </file>
 
@@ -4901,7 +4764,7 @@
         <p:spPr>
           <a:xfrm>
             <a:off x="0" y="5061182"/>
-            <a:ext cx="12192000" cy="830997"/>
+            <a:ext cx="12192000" cy="646331"/>
           </a:xfrm>
           <a:prstGeom prst="rect">
             <a:avLst/>
@@ -4916,14 +4779,14 @@
           <a:p>
             <a:pPr algn="ctr"/>
             <a:r>
-              <a:rPr lang="en-US" sz="4800" b="1" dirty="0">
+              <a:rPr lang="en-US" sz="3600" b="1" dirty="0">
                 <a:solidFill>
                   <a:srgbClr val="660033"/>
                 </a:solidFill>
               </a:rPr>
               <a:t>( 2 / 4 )</a:t>
             </a:r>
-            <a:endParaRPr lang="vi-VN" sz="4800" b="1" dirty="0">
+            <a:endParaRPr lang="vi-VN" sz="3600" b="1" dirty="0">
               <a:solidFill>
                 <a:srgbClr val="660033"/>
               </a:solidFill>
@@ -4941,13 +4804,6 @@
   <p:clrMapOvr>
     <a:masterClrMapping/>
   </p:clrMapOvr>
-  <p:timing>
-    <p:tnLst>
-      <p:par>
-        <p:cTn id="1" dur="indefinite" restart="never" nodeType="tmRoot"/>
-      </p:par>
-    </p:tnLst>
-  </p:timing>
 </p:sld>
 </file>
 
@@ -5044,7 +4900,7 @@
         <p:spPr>
           <a:xfrm>
             <a:off x="0" y="5061182"/>
-            <a:ext cx="12192000" cy="830997"/>
+            <a:ext cx="12192000" cy="646331"/>
           </a:xfrm>
           <a:prstGeom prst="rect">
             <a:avLst/>
@@ -5059,14 +4915,14 @@
           <a:p>
             <a:pPr algn="ctr"/>
             <a:r>
-              <a:rPr lang="en-US" sz="4800" b="1" dirty="0">
+              <a:rPr lang="en-US" sz="3600" b="1" dirty="0">
                 <a:solidFill>
                   <a:srgbClr val="660033"/>
                 </a:solidFill>
               </a:rPr>
               <a:t>( 2 / 4 )</a:t>
             </a:r>
-            <a:endParaRPr lang="vi-VN" sz="4800" b="1" dirty="0">
+            <a:endParaRPr lang="vi-VN" sz="3600" b="1" dirty="0">
               <a:solidFill>
                 <a:srgbClr val="660033"/>
               </a:solidFill>
@@ -5084,13 +4940,6 @@
   <p:clrMapOvr>
     <a:masterClrMapping/>
   </p:clrMapOvr>
-  <p:timing>
-    <p:tnLst>
-      <p:par>
-        <p:cTn id="1" dur="indefinite" restart="never" nodeType="tmRoot"/>
-      </p:par>
-    </p:tnLst>
-  </p:timing>
 </p:sld>
 </file>
 
@@ -5188,13 +5037,6 @@
   <p:clrMapOvr>
     <a:masterClrMapping/>
   </p:clrMapOvr>
-  <p:timing>
-    <p:tnLst>
-      <p:par>
-        <p:cTn id="1" dur="indefinite" restart="never" nodeType="tmRoot"/>
-      </p:par>
-    </p:tnLst>
-  </p:timing>
 </p:sld>
 </file>
 
@@ -5292,13 +5134,6 @@
   <p:clrMapOvr>
     <a:masterClrMapping/>
   </p:clrMapOvr>
-  <p:timing>
-    <p:tnLst>
-      <p:par>
-        <p:cTn id="1" dur="indefinite" restart="never" nodeType="tmRoot"/>
-      </p:par>
-    </p:tnLst>
-  </p:timing>
 </p:sld>
 </file>
 
